--- a/Presentation.pptx
+++ b/Presentation.pptx
@@ -15,8 +15,8 @@
     <p:sldId id="263" r:id="rId9"/>
     <p:sldId id="264" r:id="rId10"/>
     <p:sldId id="267" r:id="rId11"/>
-    <p:sldId id="265" r:id="rId12"/>
-    <p:sldId id="268" r:id="rId13"/>
+    <p:sldId id="268" r:id="rId12"/>
+    <p:sldId id="265" r:id="rId13"/>
     <p:sldId id="266" r:id="rId14"/>
     <p:sldId id="269" r:id="rId15"/>
     <p:sldId id="270" r:id="rId16"/>
@@ -134,8 +134,8 @@
             <p14:sldId id="263"/>
             <p14:sldId id="264"/>
             <p14:sldId id="267"/>
+            <p14:sldId id="268"/>
             <p14:sldId id="265"/>
-            <p14:sldId id="268"/>
             <p14:sldId id="266"/>
             <p14:sldId id="269"/>
             <p14:sldId id="270"/>
@@ -143,6 +143,9 @@
           </p14:sldIdLst>
         </p14:section>
       </p14:sectionLst>
+    </p:ext>
+    <p:ext uri="{EFAFB233-063F-42B5-8137-9DF3F51BA10A}">
+      <p15:sldGuideLst xmlns:p15="http://schemas.microsoft.com/office/powerpoint/2012/main"/>
     </p:ext>
   </p:extLst>
 </p:presentation>
@@ -3661,19 +3664,17 @@
       </p:sp>
       <p:pic>
         <p:nvPicPr>
-          <p:cNvPr id="6" name="Content Placeholder 5">
-            <a:extLst>
-              <a:ext uri="{FF2B5EF4-FFF2-40B4-BE49-F238E27FC236}">
-                <a16:creationId xmlns:a16="http://schemas.microsoft.com/office/drawing/2014/main" id="{72C71052-1BF2-09A3-67E1-3CD4DDCEEA20}"/>
+          <p:cNvPr id="4" name="Picture 3">
+            <a:extLst>
+              <a:ext uri="{FF2B5EF4-FFF2-40B4-BE49-F238E27FC236}">
+                <a16:creationId xmlns:a16="http://schemas.microsoft.com/office/drawing/2014/main" id="{302FD7A1-CCC6-0F1E-07AB-2FE88BE81468}"/>
               </a:ext>
             </a:extLst>
           </p:cNvPr>
           <p:cNvPicPr>
-            <a:picLocks noGrp="1" noChangeAspect="1"/>
+            <a:picLocks noChangeAspect="1"/>
           </p:cNvPicPr>
-          <p:nvPr>
-            <p:ph idx="1"/>
-          </p:nvPr>
+          <p:nvPr/>
         </p:nvPicPr>
         <p:blipFill>
           <a:blip r:embed="rId2"/>
@@ -3683,8 +3684,8 @@
         </p:blipFill>
         <p:spPr>
           <a:xfrm>
-            <a:off x="1815689" y="1825625"/>
-            <a:ext cx="8560622" cy="4351338"/>
+            <a:off x="7946835" y="-9144"/>
+            <a:ext cx="4254310" cy="1261872"/>
           </a:xfrm>
           <a:prstGeom prst="rect">
             <a:avLst/>
@@ -3693,17 +3694,19 @@
       </p:pic>
       <p:pic>
         <p:nvPicPr>
-          <p:cNvPr id="4" name="Picture 3">
-            <a:extLst>
-              <a:ext uri="{FF2B5EF4-FFF2-40B4-BE49-F238E27FC236}">
-                <a16:creationId xmlns:a16="http://schemas.microsoft.com/office/drawing/2014/main" id="{302FD7A1-CCC6-0F1E-07AB-2FE88BE81468}"/>
+          <p:cNvPr id="8" name="Content Placeholder 7">
+            <a:extLst>
+              <a:ext uri="{FF2B5EF4-FFF2-40B4-BE49-F238E27FC236}">
+                <a16:creationId xmlns:a16="http://schemas.microsoft.com/office/drawing/2014/main" id="{2AAEC74B-48E8-2254-8EF5-F4F775AD8429}"/>
               </a:ext>
             </a:extLst>
           </p:cNvPr>
           <p:cNvPicPr>
-            <a:picLocks noChangeAspect="1"/>
+            <a:picLocks noGrp="1" noChangeAspect="1"/>
           </p:cNvPicPr>
-          <p:nvPr/>
+          <p:nvPr>
+            <p:ph idx="1"/>
+          </p:nvPr>
         </p:nvPicPr>
         <p:blipFill>
           <a:blip r:embed="rId3"/>
@@ -3713,8 +3716,8 @@
         </p:blipFill>
         <p:spPr>
           <a:xfrm>
-            <a:off x="7946835" y="-9144"/>
-            <a:ext cx="4254310" cy="1261872"/>
+            <a:off x="1070036" y="1825625"/>
+            <a:ext cx="10051928" cy="4351338"/>
           </a:xfrm>
           <a:prstGeom prst="rect">
             <a:avLst/>
@@ -3742,6 +3745,146 @@
         <p:cNvPr id="1" name="">
           <a:extLst>
             <a:ext uri="{FF2B5EF4-FFF2-40B4-BE49-F238E27FC236}">
+              <a16:creationId xmlns:a16="http://schemas.microsoft.com/office/drawing/2014/main" id="{0B962073-B04F-5187-BCEE-64273B1DBB89}"/>
+            </a:ext>
+          </a:extLst>
+        </p:cNvPr>
+        <p:cNvGrpSpPr/>
+        <p:nvPr/>
+      </p:nvGrpSpPr>
+      <p:grpSpPr>
+        <a:xfrm>
+          <a:off x="0" y="0"/>
+          <a:ext cx="0" cy="0"/>
+          <a:chOff x="0" y="0"/>
+          <a:chExt cx="0" cy="0"/>
+        </a:xfrm>
+      </p:grpSpPr>
+      <p:sp>
+        <p:nvSpPr>
+          <p:cNvPr id="2" name="Title 1">
+            <a:extLst>
+              <a:ext uri="{FF2B5EF4-FFF2-40B4-BE49-F238E27FC236}">
+                <a16:creationId xmlns:a16="http://schemas.microsoft.com/office/drawing/2014/main" id="{28A59C49-E02C-0D9D-CFB8-8D279A474DED}"/>
+              </a:ext>
+            </a:extLst>
+          </p:cNvPr>
+          <p:cNvSpPr>
+            <a:spLocks noGrp="1"/>
+          </p:cNvSpPr>
+          <p:nvPr>
+            <p:ph type="title"/>
+          </p:nvPr>
+        </p:nvSpPr>
+        <p:spPr>
+          <a:xfrm>
+            <a:off x="838200" y="365125"/>
+            <a:ext cx="7034784" cy="1325563"/>
+          </a:xfrm>
+        </p:spPr>
+        <p:txBody>
+          <a:bodyPr>
+            <a:normAutofit/>
+          </a:bodyPr>
+          <a:lstStyle/>
+          <a:p>
+            <a:r>
+              <a:rPr lang="en-US" sz="3600" dirty="0">
+                <a:latin typeface="Times New Roman" panose="02020603050405020304" pitchFamily="18" charset="0"/>
+                <a:cs typeface="Times New Roman" panose="02020603050405020304" pitchFamily="18" charset="0"/>
+              </a:rPr>
+              <a:t>What We Found: An Unexpected Truth</a:t>
+            </a:r>
+            <a:endParaRPr lang="en-IN" sz="2000" dirty="0">
+              <a:latin typeface="Times New Roman" panose="02020603050405020304" pitchFamily="18" charset="0"/>
+              <a:cs typeface="Times New Roman" panose="02020603050405020304" pitchFamily="18" charset="0"/>
+            </a:endParaRPr>
+          </a:p>
+        </p:txBody>
+      </p:sp>
+      <p:pic>
+        <p:nvPicPr>
+          <p:cNvPr id="4" name="Picture 3">
+            <a:extLst>
+              <a:ext uri="{FF2B5EF4-FFF2-40B4-BE49-F238E27FC236}">
+                <a16:creationId xmlns:a16="http://schemas.microsoft.com/office/drawing/2014/main" id="{9B924BC5-971C-AB4C-B7A4-9C6E0B46AB17}"/>
+              </a:ext>
+            </a:extLst>
+          </p:cNvPr>
+          <p:cNvPicPr>
+            <a:picLocks noChangeAspect="1"/>
+          </p:cNvPicPr>
+          <p:nvPr/>
+        </p:nvPicPr>
+        <p:blipFill>
+          <a:blip r:embed="rId2"/>
+          <a:stretch>
+            <a:fillRect/>
+          </a:stretch>
+        </p:blipFill>
+        <p:spPr>
+          <a:xfrm>
+            <a:off x="7946835" y="-9144"/>
+            <a:ext cx="4254310" cy="1261872"/>
+          </a:xfrm>
+          <a:prstGeom prst="rect">
+            <a:avLst/>
+          </a:prstGeom>
+        </p:spPr>
+      </p:pic>
+      <p:pic>
+        <p:nvPicPr>
+          <p:cNvPr id="7" name="Content Placeholder 6">
+            <a:extLst>
+              <a:ext uri="{FF2B5EF4-FFF2-40B4-BE49-F238E27FC236}">
+                <a16:creationId xmlns:a16="http://schemas.microsoft.com/office/drawing/2014/main" id="{5585802B-C87F-6AE6-D5F5-ADFCE495F5B0}"/>
+              </a:ext>
+            </a:extLst>
+          </p:cNvPr>
+          <p:cNvPicPr>
+            <a:picLocks noGrp="1" noChangeAspect="1"/>
+          </p:cNvPicPr>
+          <p:nvPr>
+            <p:ph idx="1"/>
+          </p:nvPr>
+        </p:nvPicPr>
+        <p:blipFill>
+          <a:blip r:embed="rId3"/>
+          <a:stretch>
+            <a:fillRect/>
+          </a:stretch>
+        </p:blipFill>
+        <p:spPr>
+          <a:xfrm>
+            <a:off x="2937415" y="1825625"/>
+            <a:ext cx="6317170" cy="4351338"/>
+          </a:xfrm>
+          <a:prstGeom prst="rect">
+            <a:avLst/>
+          </a:prstGeom>
+        </p:spPr>
+      </p:pic>
+    </p:spTree>
+    <p:extLst>
+      <p:ext uri="{BB962C8B-B14F-4D97-AF65-F5344CB8AC3E}">
+        <p14:creationId xmlns:p14="http://schemas.microsoft.com/office/powerpoint/2010/main" val="3220496923"/>
+      </p:ext>
+    </p:extLst>
+  </p:cSld>
+  <p:clrMapOvr>
+    <a:masterClrMapping/>
+  </p:clrMapOvr>
+</p:sld>
+</file>
+
+<file path=ppt/slides/slide12.xml><?xml version="1.0" encoding="utf-8"?>
+<p:sld xmlns:a="http://schemas.openxmlformats.org/drawingml/2006/main" xmlns:r="http://schemas.openxmlformats.org/officeDocument/2006/relationships" xmlns:p="http://schemas.openxmlformats.org/presentationml/2006/main">
+  <p:cSld>
+    <p:spTree>
+      <p:nvGrpSpPr>
+        <p:cNvPr id="1" name="">
+          <a:extLst>
+            <a:ext uri="{FF2B5EF4-FFF2-40B4-BE49-F238E27FC236}">
               <a16:creationId xmlns:a16="http://schemas.microsoft.com/office/drawing/2014/main" id="{6EDCB173-64F4-7C21-C44B-2ECA1D1BC2D0}"/>
             </a:ext>
           </a:extLst>
@@ -3865,146 +4008,6 @@
     <p:extLst>
       <p:ext uri="{BB962C8B-B14F-4D97-AF65-F5344CB8AC3E}">
         <p14:creationId xmlns:p14="http://schemas.microsoft.com/office/powerpoint/2010/main" val="3926112167"/>
-      </p:ext>
-    </p:extLst>
-  </p:cSld>
-  <p:clrMapOvr>
-    <a:masterClrMapping/>
-  </p:clrMapOvr>
-</p:sld>
-</file>
-
-<file path=ppt/slides/slide12.xml><?xml version="1.0" encoding="utf-8"?>
-<p:sld xmlns:a="http://schemas.openxmlformats.org/drawingml/2006/main" xmlns:r="http://schemas.openxmlformats.org/officeDocument/2006/relationships" xmlns:p="http://schemas.openxmlformats.org/presentationml/2006/main">
-  <p:cSld>
-    <p:spTree>
-      <p:nvGrpSpPr>
-        <p:cNvPr id="1" name="">
-          <a:extLst>
-            <a:ext uri="{FF2B5EF4-FFF2-40B4-BE49-F238E27FC236}">
-              <a16:creationId xmlns:a16="http://schemas.microsoft.com/office/drawing/2014/main" id="{0B962073-B04F-5187-BCEE-64273B1DBB89}"/>
-            </a:ext>
-          </a:extLst>
-        </p:cNvPr>
-        <p:cNvGrpSpPr/>
-        <p:nvPr/>
-      </p:nvGrpSpPr>
-      <p:grpSpPr>
-        <a:xfrm>
-          <a:off x="0" y="0"/>
-          <a:ext cx="0" cy="0"/>
-          <a:chOff x="0" y="0"/>
-          <a:chExt cx="0" cy="0"/>
-        </a:xfrm>
-      </p:grpSpPr>
-      <p:sp>
-        <p:nvSpPr>
-          <p:cNvPr id="2" name="Title 1">
-            <a:extLst>
-              <a:ext uri="{FF2B5EF4-FFF2-40B4-BE49-F238E27FC236}">
-                <a16:creationId xmlns:a16="http://schemas.microsoft.com/office/drawing/2014/main" id="{28A59C49-E02C-0D9D-CFB8-8D279A474DED}"/>
-              </a:ext>
-            </a:extLst>
-          </p:cNvPr>
-          <p:cNvSpPr>
-            <a:spLocks noGrp="1"/>
-          </p:cNvSpPr>
-          <p:nvPr>
-            <p:ph type="title"/>
-          </p:nvPr>
-        </p:nvSpPr>
-        <p:spPr>
-          <a:xfrm>
-            <a:off x="838200" y="365125"/>
-            <a:ext cx="7034784" cy="1325563"/>
-          </a:xfrm>
-        </p:spPr>
-        <p:txBody>
-          <a:bodyPr>
-            <a:normAutofit/>
-          </a:bodyPr>
-          <a:lstStyle/>
-          <a:p>
-            <a:r>
-              <a:rPr lang="en-US" sz="3600" dirty="0">
-                <a:latin typeface="Times New Roman" panose="02020603050405020304" pitchFamily="18" charset="0"/>
-                <a:cs typeface="Times New Roman" panose="02020603050405020304" pitchFamily="18" charset="0"/>
-              </a:rPr>
-              <a:t>What We Found: An Unexpected Truth</a:t>
-            </a:r>
-            <a:endParaRPr lang="en-IN" sz="2000" dirty="0">
-              <a:latin typeface="Times New Roman" panose="02020603050405020304" pitchFamily="18" charset="0"/>
-              <a:cs typeface="Times New Roman" panose="02020603050405020304" pitchFamily="18" charset="0"/>
-            </a:endParaRPr>
-          </a:p>
-        </p:txBody>
-      </p:sp>
-      <p:pic>
-        <p:nvPicPr>
-          <p:cNvPr id="4" name="Picture 3">
-            <a:extLst>
-              <a:ext uri="{FF2B5EF4-FFF2-40B4-BE49-F238E27FC236}">
-                <a16:creationId xmlns:a16="http://schemas.microsoft.com/office/drawing/2014/main" id="{9B924BC5-971C-AB4C-B7A4-9C6E0B46AB17}"/>
-              </a:ext>
-            </a:extLst>
-          </p:cNvPr>
-          <p:cNvPicPr>
-            <a:picLocks noChangeAspect="1"/>
-          </p:cNvPicPr>
-          <p:nvPr/>
-        </p:nvPicPr>
-        <p:blipFill>
-          <a:blip r:embed="rId2"/>
-          <a:stretch>
-            <a:fillRect/>
-          </a:stretch>
-        </p:blipFill>
-        <p:spPr>
-          <a:xfrm>
-            <a:off x="7946835" y="-9144"/>
-            <a:ext cx="4254310" cy="1261872"/>
-          </a:xfrm>
-          <a:prstGeom prst="rect">
-            <a:avLst/>
-          </a:prstGeom>
-        </p:spPr>
-      </p:pic>
-      <p:pic>
-        <p:nvPicPr>
-          <p:cNvPr id="10" name="Content Placeholder 9">
-            <a:extLst>
-              <a:ext uri="{FF2B5EF4-FFF2-40B4-BE49-F238E27FC236}">
-                <a16:creationId xmlns:a16="http://schemas.microsoft.com/office/drawing/2014/main" id="{71BA4F6B-BD22-4CC0-5797-7264306C84A7}"/>
-              </a:ext>
-            </a:extLst>
-          </p:cNvPr>
-          <p:cNvPicPr>
-            <a:picLocks noGrp="1" noChangeAspect="1"/>
-          </p:cNvPicPr>
-          <p:nvPr>
-            <p:ph idx="1"/>
-          </p:nvPr>
-        </p:nvPicPr>
-        <p:blipFill>
-          <a:blip r:embed="rId3"/>
-          <a:stretch>
-            <a:fillRect/>
-          </a:stretch>
-        </p:blipFill>
-        <p:spPr>
-          <a:xfrm>
-            <a:off x="2009270" y="1825625"/>
-            <a:ext cx="8173459" cy="4351338"/>
-          </a:xfrm>
-          <a:prstGeom prst="rect">
-            <a:avLst/>
-          </a:prstGeom>
-        </p:spPr>
-      </p:pic>
-    </p:spTree>
-    <p:extLst>
-      <p:ext uri="{BB962C8B-B14F-4D97-AF65-F5344CB8AC3E}">
-        <p14:creationId xmlns:p14="http://schemas.microsoft.com/office/powerpoint/2010/main" val="3220496923"/>
       </p:ext>
     </p:extLst>
   </p:cSld>
@@ -4447,7 +4450,10 @@
           <a:lstStyle/>
           <a:p>
             <a:r>
-              <a:rPr lang="en-IN" dirty="0"/>
+              <a:rPr lang="en-IN" dirty="0">
+                <a:latin typeface="Times New Roman" panose="02020603050405020304" pitchFamily="18" charset="0"/>
+                <a:cs typeface="Times New Roman" panose="02020603050405020304" pitchFamily="18" charset="0"/>
+              </a:rPr>
               <a:t>What's Next?</a:t>
             </a:r>
             <a:endParaRPr lang="en-IN" sz="2000" dirty="0">
@@ -4506,7 +4512,7 @@
         <p:spPr/>
         <p:txBody>
           <a:bodyPr>
-            <a:normAutofit fontScale="92500" lnSpcReduction="20000"/>
+            <a:normAutofit fontScale="92500"/>
           </a:bodyPr>
           <a:lstStyle/>
           <a:p>
@@ -4514,65 +4520,102 @@
               <a:buNone/>
             </a:pPr>
             <a:r>
-              <a:rPr lang="en-US" b="1" dirty="0"/>
+              <a:rPr lang="en-US" b="1" dirty="0">
+                <a:latin typeface="Times New Roman" panose="02020603050405020304" pitchFamily="18" charset="0"/>
+                <a:cs typeface="Times New Roman" panose="02020603050405020304" pitchFamily="18" charset="0"/>
+              </a:rPr>
               <a:t>Future Directions:</a:t>
             </a:r>
-            <a:endParaRPr lang="en-US" dirty="0"/>
-          </a:p>
-          <a:p>
-            <a:r>
-              <a:rPr lang="en-US" dirty="0"/>
+            <a:endParaRPr lang="en-US" dirty="0">
+              <a:latin typeface="Times New Roman" panose="02020603050405020304" pitchFamily="18" charset="0"/>
+              <a:cs typeface="Times New Roman" panose="02020603050405020304" pitchFamily="18" charset="0"/>
+            </a:endParaRPr>
+          </a:p>
+          <a:p>
+            <a:r>
+              <a:rPr lang="en-US" dirty="0">
+                <a:latin typeface="Times New Roman" panose="02020603050405020304" pitchFamily="18" charset="0"/>
+                <a:cs typeface="Times New Roman" panose="02020603050405020304" pitchFamily="18" charset="0"/>
+              </a:rPr>
               <a:t>Need 100+ patients per group for reliable training</a:t>
             </a:r>
           </a:p>
           <a:p>
             <a:r>
-              <a:rPr lang="en-US" dirty="0"/>
+              <a:rPr lang="en-US" dirty="0">
+                <a:latin typeface="Times New Roman" panose="02020603050405020304" pitchFamily="18" charset="0"/>
+                <a:cs typeface="Times New Roman" panose="02020603050405020304" pitchFamily="18" charset="0"/>
+              </a:rPr>
               <a:t>Integrate sleep data (polysomnography) and heart rate variability</a:t>
             </a:r>
           </a:p>
           <a:p>
             <a:r>
-              <a:rPr lang="en-US" dirty="0"/>
+              <a:rPr lang="en-US" dirty="0">
+                <a:latin typeface="Times New Roman" panose="02020603050405020304" pitchFamily="18" charset="0"/>
+                <a:cs typeface="Times New Roman" panose="02020603050405020304" pitchFamily="18" charset="0"/>
+              </a:rPr>
               <a:t>Multi-modal biomarkers (activity + sleep + heart rate + mood) needed</a:t>
             </a:r>
           </a:p>
           <a:p>
             <a:r>
-              <a:rPr lang="en-US" dirty="0"/>
+              <a:rPr lang="en-US" dirty="0">
+                <a:latin typeface="Times New Roman" panose="02020603050405020304" pitchFamily="18" charset="0"/>
+                <a:cs typeface="Times New Roman" panose="02020603050405020304" pitchFamily="18" charset="0"/>
+              </a:rPr>
               <a:t>Wearables excel at monitoring treatment response over time</a:t>
             </a:r>
-          </a:p>
-          <a:p>
             <a:br>
-              <a:rPr lang="en-US" dirty="0"/>
+              <a:rPr lang="en-US" dirty="0">
+                <a:latin typeface="Times New Roman" panose="02020603050405020304" pitchFamily="18" charset="0"/>
+                <a:cs typeface="Times New Roman" panose="02020603050405020304" pitchFamily="18" charset="0"/>
+              </a:rPr>
             </a:br>
-            <a:endParaRPr lang="en-US" dirty="0"/>
+            <a:endParaRPr lang="en-US" dirty="0">
+              <a:latin typeface="Times New Roman" panose="02020603050405020304" pitchFamily="18" charset="0"/>
+              <a:cs typeface="Times New Roman" panose="02020603050405020304" pitchFamily="18" charset="0"/>
+            </a:endParaRPr>
           </a:p>
           <a:p>
             <a:pPr marL="0" indent="0">
               <a:buNone/>
             </a:pPr>
             <a:r>
-              <a:rPr lang="en-US" b="1" dirty="0"/>
+              <a:rPr lang="en-US" b="1" dirty="0">
+                <a:latin typeface="Times New Roman" panose="02020603050405020304" pitchFamily="18" charset="0"/>
+                <a:cs typeface="Times New Roman" panose="02020603050405020304" pitchFamily="18" charset="0"/>
+              </a:rPr>
               <a:t>Clinical Implications:</a:t>
             </a:r>
-            <a:endParaRPr lang="en-US" dirty="0"/>
-          </a:p>
-          <a:p>
-            <a:r>
-              <a:rPr lang="en-US" dirty="0"/>
+            <a:endParaRPr lang="en-US" dirty="0">
+              <a:latin typeface="Times New Roman" panose="02020603050405020304" pitchFamily="18" charset="0"/>
+              <a:cs typeface="Times New Roman" panose="02020603050405020304" pitchFamily="18" charset="0"/>
+            </a:endParaRPr>
+          </a:p>
+          <a:p>
+            <a:r>
+              <a:rPr lang="en-US" dirty="0">
+                <a:latin typeface="Times New Roman" panose="02020603050405020304" pitchFamily="18" charset="0"/>
+                <a:cs typeface="Times New Roman" panose="02020603050405020304" pitchFamily="18" charset="0"/>
+              </a:rPr>
               <a:t>Activity tracking can't diagnose but can monitor treatment efficacy</a:t>
             </a:r>
           </a:p>
           <a:p>
             <a:r>
-              <a:rPr lang="en-US" dirty="0"/>
+              <a:rPr lang="en-US" dirty="0">
+                <a:latin typeface="Times New Roman" panose="02020603050405020304" pitchFamily="18" charset="0"/>
+                <a:cs typeface="Times New Roman" panose="02020603050405020304" pitchFamily="18" charset="0"/>
+              </a:rPr>
               <a:t>Should be part of multi-modal approach, not standalone diagnostic tool</a:t>
             </a:r>
           </a:p>
           <a:p>
-            <a:endParaRPr lang="en-IN" dirty="0"/>
+            <a:endParaRPr lang="en-IN" dirty="0">
+              <a:latin typeface="Times New Roman" panose="02020603050405020304" pitchFamily="18" charset="0"/>
+              <a:cs typeface="Times New Roman" panose="02020603050405020304" pitchFamily="18" charset="0"/>
+            </a:endParaRPr>
           </a:p>
         </p:txBody>
       </p:sp>
